--- a/library/seminars/sem-04/rendered/sem-04-en.pptx
+++ b/library/seminars/sem-04/rendered/sem-04-en.pptx
@@ -1566,13 +1566,19 @@
           <a:lstStyle/>
           <a:p>
             <a:r>
-              <a:t>"Here is the result of case 1.2: thirteen lines — the readiness criterion, the gate warning to verify delivery by hand, an honest boundary on deploys. The file is loaded in full at the start of every session; the official guideline is up to two hundred lines, and we have thirteen. `@`-imports organize the file but do not save context — what is imported is still loaded in full.</a:t>
+              <a:t>"Here is the result of case 1.2: fifteen lines — the readiness criterion, the gate warning to verify delivery by hand, an honest boundary on deploys, and one one-off step after cloning without which the tests fail instantly and for no good reason. The file is loaded in full at the start of every session; the official guideline is up to two hundred lines, and we have fifteen. `@`-imports organize the file but do not save context — what is imported is still loaded in full.</a:t>
             </a:r>
           </a:p>
           <a:p/>
           <a:p>
             <a:r>
-              <a:t>And we set up `AGENTS.md` as a symlink to the same file — one source of truth for different engines. The sharp edge: `cp -R` without `-P` on macOS silently dereferences the symlink into a second real copy — copy with `cp -a`, `git clone` or `git archive`."</a:t>
+              <a:t>A word about that last line on its own. `npx playwright install chromium` is exactly the kind of step the 'Build, test, verify' section exists for in the first place: without it, a clean clone fails every test at once, and fails them for no good reason — not because the code is broken, but because there is no browser on the machine. An agent that has read this will not start repairing code that works.</a:t>
+            </a:r>
+          </a:p>
+          <a:p/>
+          <a:p>
+            <a:r>
+              <a:t>`AGENTS.md` has been with us since day one — a symlink to this same file, one source of truth for different engines. Note that it is set up right away, and it holds exactly as much content as `CLAUDE.md`, because it is one and the same file. The sharp edge here is not that some system behaves incorrectly, but that the behaviour of `cp -R` on a symlink is simply not defined by the standard: POSIX states outright that with `-R` and none of `-H`, `-L` or `-P`, the default is unspecified. On GNU coreutils the symlink survives the copy, but that cannot be relied on — `-P` states the intent explicitly. What does break the symlink for certain is `-L`: `cp -RL` will give you a second real copy, and from then on the two files quietly drift apart. The safest way to move the project is `git clone` or `git archive`."</a:t>
             </a:r>
           </a:p>
         </p:txBody>
@@ -2158,7 +2164,7 @@
           <a:lstStyle/>
           <a:p>
             <a:r>
-              <a:t>"On our repository the root file has not changed — the same thirteen lines. The detail about the retried submit went off into a comment on the function itself: you edit it, you read the file, you see the comment. The test convention did not get set up as a separate file, because it already sits in the three existing tests: an agent that opens any one of them sees the page object in the code. The same logic as in the first case — whatever is derivable, the agent will derive by itself — and with the same honest caveat: it follows from the mechanism, it has not been measured directly. Neither `tests/CLAUDE.md` nor `src/CLAUDE.md` ever appeared in the repository.</a:t>
+              <a:t>"On our repository the root file has not changed — the same fifteen lines. The detail about the retried submit went off into a comment on the function itself: you edit it, you read the file, you see the comment. The test convention did not get set up as a separate file, because it already sits in the three existing tests: an agent that opens any one of them sees the page object in the code. The same logic as in the first case — whatever is derivable, the agent will derive by itself — and with the same honest caveat: it follows from the mechanism, it has not been measured directly. Neither `tests/CLAUDE.md` nor `src/CLAUDE.md` ever appeared in the repository.</a:t>
             </a:r>
           </a:p>
           <a:p/>
@@ -2580,7 +2586,7 @@
           <a:p/>
           <a:p>
             <a:r>
-              <a:t>And the flip side, which is more honest to name right away: an entry the agent did not open costs nothing and gives nothing. In our final instruction file — the thirteen lines from case 1.2 — there is no pointer to `DECISIONS.md`. Which means we currently have no guaranteed path from the auto-loaded layer to the decision log. That is an open question, not a closed one."</a:t>
+              <a:t>And the flip side, which is more honest to name right away: an entry the agent did not open costs nothing and gives nothing. In our final instruction file — the fifteen lines from case 1.2 — there is no pointer to `DECISIONS.md`. Which means we currently have no guaranteed path from the auto-loaded layer to the decision log. That is an open question, not a closed one."</a:t>
             </a:r>
           </a:p>
         </p:txBody>
@@ -2914,7 +2920,7 @@
           <a:p/>
           <a:p>
             <a:r>
-              <a:t>`DECISIONS.md` is the second mechanism, a git-tracked append-only log, set up on day 0. What is new here is not the file but the first substantive entry in it, and its date is today's: the decision was made a few days ago and was written down only now. This is a real file from a real demo repository, not an example made up for the slide.</a:t>
+              <a:t>`DECISIONS.md` is the second mechanism, a git-tracked append-only log, set up on day 0. What is new here is not the file but the first substantive entry in it, and its date is today's: the decision was made a few days ago and was written down only now. This is a real file from a real demo repository, not an example made up for the slide — and the date in it is the real one, the one the commit actually carries in git. We deliberately do not reconcile the session calendar ("the end of the first week") with the git dates: the repository was assembled over two days, while the session runs on its own clock.</a:t>
             </a:r>
           </a:p>
         </p:txBody>
@@ -9956,7 +9962,7 @@
         <p:spPr>
           <a:xfrm>
             <a:off x="502920" y="2359152"/>
-            <a:ext cx="5349240" cy="2788920"/>
+            <a:ext cx="5349240" cy="3063240"/>
           </a:xfrm>
           <a:prstGeom prst="roundRect">
             <a:avLst>
@@ -10043,7 +10049,7 @@
         <p:spPr>
           <a:xfrm>
             <a:off x="704088" y="2871216"/>
-            <a:ext cx="4946903" cy="2075688"/>
+            <a:ext cx="4946903" cy="2350008"/>
           </a:xfrm>
           <a:prstGeom prst="rect">
             <a:avLst/>
@@ -10207,6 +10213,25 @@
               <a:t>CLAUDE.md ← set up, has the gate line, nothing else</a:t>
             </a:r>
           </a:p>
+          <a:p>
+            <a:pPr algn="l">
+              <a:lnSpc>
+                <a:spcPct val="132000"/>
+              </a:lnSpc>
+              <a:spcAft>
+                <a:spcPts val="200"/>
+              </a:spcAft>
+            </a:pPr>
+            <a:r>
+              <a:rPr sz="1150" b="0" i="0">
+                <a:solidFill>
+                  <a:srgbClr val="8B9BB4"/>
+                </a:solidFill>
+                <a:latin typeface="Consolas"/>
+              </a:rPr>
+              <a:t>AGENTS.md → symlink to CLAUDE.md, set up on day 0</a:t>
+            </a:r>
+          </a:p>
         </p:txBody>
       </p:sp>
       <p:sp>
@@ -10218,11 +10243,11 @@
         <p:spPr>
           <a:xfrm>
             <a:off x="6153912" y="2359152"/>
-            <a:ext cx="5349240" cy="2788920"/>
+            <a:ext cx="5349240" cy="3063240"/>
           </a:xfrm>
           <a:prstGeom prst="roundRect">
             <a:avLst>
-              <a:gd name="adj" fmla="val 10928"/>
+              <a:gd name="adj" fmla="val 9950"/>
             </a:avLst>
           </a:prstGeom>
           <a:solidFill>
@@ -10266,7 +10291,7 @@
         <p:spPr>
           <a:xfrm>
             <a:off x="6336792" y="2505456"/>
-            <a:ext cx="4983479" cy="2496312"/>
+            <a:ext cx="4983479" cy="2770632"/>
           </a:xfrm>
           <a:prstGeom prst="rect">
             <a:avLst/>
@@ -10304,8 +10329,8 @@
         </p:nvSpPr>
         <p:spPr>
           <a:xfrm>
-            <a:off x="502920" y="5376672"/>
-            <a:ext cx="11183112" cy="1024128"/>
+            <a:off x="502920" y="5650992"/>
+            <a:ext cx="11183112" cy="749808"/>
           </a:xfrm>
           <a:prstGeom prst="roundRect">
             <a:avLst>
@@ -10352,8 +10377,8 @@
         </p:nvSpPr>
         <p:spPr>
           <a:xfrm>
-            <a:off x="704088" y="5449824"/>
-            <a:ext cx="10780776" cy="877824"/>
+            <a:off x="704088" y="5724144"/>
+            <a:ext cx="10780776" cy="603504"/>
           </a:xfrm>
           <a:prstGeom prst="rect">
             <a:avLst/>
@@ -13178,7 +13203,7 @@
         <p:spPr>
           <a:xfrm>
             <a:off x="502920" y="2176272"/>
-            <a:ext cx="11183112" cy="2834640"/>
+            <a:ext cx="11183112" cy="3108960"/>
           </a:xfrm>
           <a:prstGeom prst="roundRect">
             <a:avLst>
@@ -13265,7 +13290,7 @@
         <p:spPr>
           <a:xfrm>
             <a:off x="704088" y="2688336"/>
-            <a:ext cx="10780776" cy="2121408"/>
+            <a:ext cx="10780776" cy="2395728"/>
           </a:xfrm>
           <a:prstGeom prst="rect">
             <a:avLst/>
@@ -13429,6 +13454,25 @@
               <a:t>CLAUDE.md        ← set up, still empty</a:t>
             </a:r>
           </a:p>
+          <a:p>
+            <a:pPr algn="l">
+              <a:lnSpc>
+                <a:spcPct val="132000"/>
+              </a:lnSpc>
+              <a:spcAft>
+                <a:spcPts val="200"/>
+              </a:spcAft>
+            </a:pPr>
+            <a:r>
+              <a:rPr sz="1150" b="0" i="0">
+                <a:solidFill>
+                  <a:srgbClr val="8B9BB4"/>
+                </a:solidFill>
+                <a:latin typeface="Consolas"/>
+              </a:rPr>
+              <a:t>AGENTS.md        → symlink to CLAUDE.md, set up on day 0</a:t>
+            </a:r>
+          </a:p>
         </p:txBody>
       </p:sp>
       <p:sp>
@@ -13439,8 +13483,8 @@
         </p:nvSpPr>
         <p:spPr>
           <a:xfrm>
-            <a:off x="502920" y="5212080"/>
-            <a:ext cx="11183112" cy="1188719"/>
+            <a:off x="502920" y="5486400"/>
+            <a:ext cx="11183112" cy="914400"/>
           </a:xfrm>
           <a:prstGeom prst="roundRect">
             <a:avLst>
@@ -13487,8 +13531,8 @@
         </p:nvSpPr>
         <p:spPr>
           <a:xfrm>
-            <a:off x="704088" y="5285232"/>
-            <a:ext cx="10780776" cy="1042415"/>
+            <a:off x="704088" y="5559552"/>
+            <a:ext cx="10780776" cy="768096"/>
           </a:xfrm>
           <a:prstGeom prst="rect">
             <a:avLst/>
@@ -18805,7 +18849,7 @@
         <p:spPr>
           <a:xfrm>
             <a:off x="502920" y="640080"/>
-            <a:ext cx="11183112" cy="1188720"/>
+            <a:ext cx="11183112" cy="1554480"/>
           </a:xfrm>
           <a:prstGeom prst="rect">
             <a:avLst/>
@@ -18824,13 +18868,13 @@
               </a:lnSpc>
             </a:pPr>
             <a:r>
-              <a:rPr sz="1450" b="1" i="0">
+              <a:rPr sz="1200" b="1" i="0">
                 <a:solidFill>
                   <a:srgbClr val="21295C"/>
                 </a:solidFill>
                 <a:latin typeface="Arial"/>
               </a:rPr>
-              <a:t>The final file is thirteen lines: the "done" criterion, the gate warning, an honest caveat about the limit; AGENTS.md is a symlink to the same file</a:t>
+              <a:t>The final file is fifteen lines: the "done" criterion, the gate warning, an honest caveat about the limit, and one one-off step without which the tests fail for no good reason; AGENTS.md is a symlink to the same file</a:t>
             </a:r>
           </a:p>
         </p:txBody>
@@ -18843,8 +18887,8 @@
         </p:nvSpPr>
         <p:spPr>
           <a:xfrm>
-            <a:off x="502920" y="1993392"/>
-            <a:ext cx="6126480" cy="4343400"/>
+            <a:off x="502920" y="2359152"/>
+            <a:ext cx="6446520" cy="4059935"/>
           </a:xfrm>
           <a:prstGeom prst="roundRect">
             <a:avLst>
@@ -18891,8 +18935,8 @@
         </p:nvSpPr>
         <p:spPr>
           <a:xfrm>
-            <a:off x="704088" y="2194560"/>
-            <a:ext cx="5724144" cy="3941063"/>
+            <a:off x="704088" y="2560320"/>
+            <a:ext cx="6044183" cy="3657599"/>
           </a:xfrm>
           <a:prstGeom prst="rect">
             <a:avLst/>
@@ -18907,14 +18951,14 @@
           <a:p>
             <a:pPr algn="l">
               <a:lnSpc>
-                <a:spcPct val="128000"/>
+                <a:spcPct val="120000"/>
               </a:lnSpc>
               <a:spcAft>
                 <a:spcPts val="200"/>
               </a:spcAft>
             </a:pPr>
             <a:r>
-              <a:rPr sz="1100" b="1" i="0">
+              <a:rPr sz="980" b="1" i="0">
                 <a:solidFill>
                   <a:srgbClr val="028090"/>
                 </a:solidFill>
@@ -18926,14 +18970,14 @@
           <a:p>
             <a:pPr algn="l">
               <a:lnSpc>
-                <a:spcPct val="128000"/>
+                <a:spcPct val="120000"/>
               </a:lnSpc>
               <a:spcAft>
                 <a:spcPts val="200"/>
               </a:spcAft>
             </a:pPr>
             <a:r>
-              <a:rPr sz="1100" b="0" i="0">
+              <a:rPr sz="980" b="0" i="0">
                 <a:solidFill>
                   <a:srgbClr val="E3E9F2"/>
                 </a:solidFill>
@@ -18945,14 +18989,14 @@
           <a:p>
             <a:pPr algn="l">
               <a:lnSpc>
-                <a:spcPct val="128000"/>
+                <a:spcPct val="120000"/>
               </a:lnSpc>
               <a:spcAft>
                 <a:spcPts val="200"/>
               </a:spcAft>
             </a:pPr>
             <a:r>
-              <a:rPr sz="1100" b="0" i="0">
+              <a:rPr sz="980" b="0" i="0">
                 <a:solidFill>
                   <a:srgbClr val="E3E9F2"/>
                 </a:solidFill>
@@ -18964,52 +19008,52 @@
           <a:p>
             <a:pPr algn="l">
               <a:lnSpc>
-                <a:spcPct val="128000"/>
+                <a:spcPct val="120000"/>
               </a:lnSpc>
               <a:spcAft>
                 <a:spcPts val="200"/>
               </a:spcAft>
             </a:pPr>
             <a:r>
-              <a:rPr sz="1100" b="0" i="0">
+              <a:rPr sz="980" b="0" i="0">
                 <a:solidFill>
                   <a:srgbClr val="E3E9F2"/>
                 </a:solidFill>
                 <a:latin typeface="Consolas"/>
               </a:rPr>
-              <a:t>Done = npm run build exit code 0, npx playwright test green,</a:t>
-            </a:r>
-          </a:p>
-          <a:p>
-            <a:pPr algn="l">
-              <a:lnSpc>
-                <a:spcPct val="128000"/>
+              <a:t>Done = npm run build exit code 0, npx playwright test green, the</a:t>
+            </a:r>
+          </a:p>
+          <a:p>
+            <a:pPr algn="l">
+              <a:lnSpc>
+                <a:spcPct val="120000"/>
               </a:lnSpc>
               <a:spcAft>
                 <a:spcPts val="200"/>
               </a:spcAft>
             </a:pPr>
             <a:r>
-              <a:rPr sz="1100" b="0" i="0">
+              <a:rPr sz="980" b="0" i="0">
                 <a:solidFill>
                   <a:srgbClr val="E3E9F2"/>
                 </a:solidFill>
                 <a:latin typeface="Consolas"/>
               </a:rPr>
-              <a:t>the form really sends the request in production.</a:t>
-            </a:r>
-          </a:p>
-          <a:p>
-            <a:pPr algn="l">
-              <a:lnSpc>
-                <a:spcPct val="128000"/>
+              <a:t>form submitted by hand from the built dist/ — filled in and empty.</a:t>
+            </a:r>
+          </a:p>
+          <a:p>
+            <a:pPr algn="l">
+              <a:lnSpc>
+                <a:spcPct val="120000"/>
               </a:lnSpc>
               <a:spcAft>
                 <a:spcPts val="200"/>
               </a:spcAft>
             </a:pPr>
             <a:r>
-              <a:rPr sz="1100" b="0" i="0">
+              <a:rPr sz="980" b="0" i="0">
                 <a:solidFill>
                   <a:srgbClr val="E3E9F2"/>
                 </a:solidFill>
@@ -19021,14 +19065,14 @@
           <a:p>
             <a:pPr algn="l">
               <a:lnSpc>
-                <a:spcPct val="128000"/>
+                <a:spcPct val="120000"/>
               </a:lnSpc>
               <a:spcAft>
                 <a:spcPts val="200"/>
               </a:spcAft>
             </a:pPr>
             <a:r>
-              <a:rPr sz="1100" b="1" i="0">
+              <a:rPr sz="980" b="1" i="0">
                 <a:solidFill>
                   <a:srgbClr val="028090"/>
                 </a:solidFill>
@@ -19040,14 +19084,14 @@
           <a:p>
             <a:pPr algn="l">
               <a:lnSpc>
-                <a:spcPct val="128000"/>
+                <a:spcPct val="120000"/>
               </a:lnSpc>
               <a:spcAft>
                 <a:spcPts val="200"/>
               </a:spcAft>
             </a:pPr>
             <a:r>
-              <a:rPr sz="1100" b="0" i="0">
+              <a:rPr sz="980" b="0" i="0">
                 <a:solidFill>
                   <a:srgbClr val="E3E9F2"/>
                 </a:solidFill>
@@ -19059,14 +19103,14 @@
           <a:p>
             <a:pPr algn="l">
               <a:lnSpc>
-                <a:spcPct val="128000"/>
+                <a:spcPct val="120000"/>
               </a:lnSpc>
               <a:spcAft>
                 <a:spcPts val="200"/>
               </a:spcAft>
             </a:pPr>
             <a:r>
-              <a:rPr sz="1100" b="0" i="0">
+              <a:rPr sz="980" b="0" i="0">
                 <a:solidFill>
                   <a:srgbClr val="E3E9F2"/>
                 </a:solidFill>
@@ -19078,14 +19122,14 @@
           <a:p>
             <a:pPr algn="l">
               <a:lnSpc>
-                <a:spcPct val="128000"/>
+                <a:spcPct val="120000"/>
               </a:lnSpc>
               <a:spcAft>
                 <a:spcPts val="200"/>
               </a:spcAft>
             </a:pPr>
             <a:r>
-              <a:rPr sz="1100" b="1" i="0">
+              <a:rPr sz="980" b="1" i="0">
                 <a:solidFill>
                   <a:srgbClr val="028090"/>
                 </a:solidFill>
@@ -19097,39 +19141,96 @@
           <a:p>
             <a:pPr algn="l">
               <a:lnSpc>
-                <a:spcPct val="128000"/>
+                <a:spcPct val="120000"/>
               </a:lnSpc>
               <a:spcAft>
                 <a:spcPts val="200"/>
               </a:spcAft>
             </a:pPr>
             <a:r>
-              <a:rPr sz="1100" b="0" i="0">
+              <a:rPr sz="980" b="0" i="0">
                 <a:solidFill>
                   <a:srgbClr val="E3E9F2"/>
                 </a:solidFill>
                 <a:latin typeface="Consolas"/>
               </a:rPr>
-              <a:t>- To verify: open dist/index.html after the build and manually</a:t>
-            </a:r>
-          </a:p>
-          <a:p>
-            <a:pPr algn="l">
-              <a:lnSpc>
-                <a:spcPct val="128000"/>
+              <a:t>- To verify: open dist/index.html after the build and submit the</a:t>
+            </a:r>
+          </a:p>
+          <a:p>
+            <a:pPr algn="l">
+              <a:lnSpc>
+                <a:spcPct val="120000"/>
               </a:lnSpc>
               <a:spcAft>
                 <a:spcPts val="200"/>
               </a:spcAft>
             </a:pPr>
             <a:r>
-              <a:rPr sz="1100" b="0" i="0">
+              <a:rPr sz="980" b="0" i="0">
                 <a:solidFill>
                   <a:srgbClr val="E3E9F2"/>
                 </a:solidFill>
                 <a:latin typeface="Consolas"/>
               </a:rPr>
-              <a:t>  submit the form with filled-in and with empty fields.</a:t>
+              <a:t>  form by hand — with filled-in and with empty fields.</a:t>
+            </a:r>
+          </a:p>
+          <a:p>
+            <a:pPr algn="l">
+              <a:lnSpc>
+                <a:spcPct val="120000"/>
+              </a:lnSpc>
+              <a:spcAft>
+                <a:spcPts val="200"/>
+              </a:spcAft>
+            </a:pPr>
+            <a:r>
+              <a:rPr sz="980" b="0" i="0">
+                <a:solidFill>
+                  <a:srgbClr val="E3E9F2"/>
+                </a:solidFill>
+                <a:latin typeface="Consolas"/>
+              </a:rPr>
+              <a:t>- Once per machine, before the first npx playwright test: npm ci,</a:t>
+            </a:r>
+          </a:p>
+          <a:p>
+            <a:pPr algn="l">
+              <a:lnSpc>
+                <a:spcPct val="120000"/>
+              </a:lnSpc>
+              <a:spcAft>
+                <a:spcPts val="200"/>
+              </a:spcAft>
+            </a:pPr>
+            <a:r>
+              <a:rPr sz="980" b="0" i="0">
+                <a:solidFill>
+                  <a:srgbClr val="E3E9F2"/>
+                </a:solidFill>
+                <a:latin typeface="Consolas"/>
+              </a:rPr>
+              <a:t>  then npx playwright install chromium. Without the second command</a:t>
+            </a:r>
+          </a:p>
+          <a:p>
+            <a:pPr algn="l">
+              <a:lnSpc>
+                <a:spcPct val="120000"/>
+              </a:lnSpc>
+              <a:spcAft>
+                <a:spcPts val="200"/>
+              </a:spcAft>
+            </a:pPr>
+            <a:r>
+              <a:rPr sz="980" b="0" i="0">
+                <a:solidFill>
+                  <a:srgbClr val="E3E9F2"/>
+                </a:solidFill>
+                <a:latin typeface="Consolas"/>
+              </a:rPr>
+              <a:t>  every test fails at once and for no good reason.</a:t>
             </a:r>
           </a:p>
         </p:txBody>
@@ -19142,12 +19243,12 @@
         </p:nvSpPr>
         <p:spPr>
           <a:xfrm>
-            <a:off x="6903720" y="1993392"/>
-            <a:ext cx="4782312" cy="4343400"/>
+            <a:off x="7223759" y="2359152"/>
+            <a:ext cx="4462272" cy="4059935"/>
           </a:xfrm>
           <a:prstGeom prst="roundRect">
             <a:avLst>
-              <a:gd name="adj" fmla="val 7017"/>
+              <a:gd name="adj" fmla="val 7507"/>
             </a:avLst>
           </a:prstGeom>
           <a:solidFill>
@@ -19190,8 +19291,8 @@
         </p:nvSpPr>
         <p:spPr>
           <a:xfrm>
-            <a:off x="7123176" y="2212848"/>
-            <a:ext cx="457200" cy="1301495"/>
+            <a:off x="7443215" y="2578608"/>
+            <a:ext cx="457200" cy="1207007"/>
           </a:xfrm>
           <a:prstGeom prst="rect">
             <a:avLst/>
@@ -19210,7 +19311,7 @@
               </a:lnSpc>
             </a:pPr>
             <a:r>
-              <a:rPr sz="1600" b="1" i="0">
+              <a:rPr sz="1550" b="1" i="0">
                 <a:solidFill>
                   <a:srgbClr val="028090"/>
                 </a:solidFill>
@@ -19229,8 +19330,8 @@
         </p:nvSpPr>
         <p:spPr>
           <a:xfrm>
-            <a:off x="7626096" y="2212848"/>
-            <a:ext cx="3840480" cy="1301495"/>
+            <a:off x="7946136" y="2578608"/>
+            <a:ext cx="3520440" cy="1207007"/>
           </a:xfrm>
           <a:prstGeom prst="rect">
             <a:avLst/>
@@ -19249,13 +19350,13 @@
               </a:lnSpc>
             </a:pPr>
             <a:r>
-              <a:rPr sz="1200" b="0" i="0">
+              <a:rPr sz="1150" b="0" i="0">
                 <a:solidFill>
                   <a:srgbClr val="21295C"/>
                 </a:solidFill>
                 <a:latin typeface="Arial"/>
               </a:rPr>
-              <a:t>The file is loaded in full at the start of every session (the official guideline is up to 200 lines, our result is 13)</a:t>
+              <a:t>The file is loaded in full at the start of every session (the official guideline is up to 200 lines, our result is 15)</a:t>
             </a:r>
           </a:p>
         </p:txBody>
@@ -19268,8 +19369,8 @@
         </p:nvCxnSpPr>
         <p:spPr>
           <a:xfrm>
-            <a:off x="7123176" y="3514343"/>
-            <a:ext cx="4343400" cy="0"/>
+            <a:off x="7443215" y="3785616"/>
+            <a:ext cx="4023361" cy="0"/>
           </a:xfrm>
           <a:prstGeom prst="line">
             <a:avLst/>
@@ -19303,8 +19404,8 @@
         </p:nvSpPr>
         <p:spPr>
           <a:xfrm>
-            <a:off x="7123176" y="3514343"/>
-            <a:ext cx="457200" cy="1301495"/>
+            <a:off x="7443215" y="3785616"/>
+            <a:ext cx="457200" cy="1207007"/>
           </a:xfrm>
           <a:prstGeom prst="rect">
             <a:avLst/>
@@ -19323,7 +19424,7 @@
               </a:lnSpc>
             </a:pPr>
             <a:r>
-              <a:rPr sz="1600" b="1" i="0">
+              <a:rPr sz="1550" b="1" i="0">
                 <a:solidFill>
                   <a:srgbClr val="028090"/>
                 </a:solidFill>
@@ -19342,8 +19443,8 @@
         </p:nvSpPr>
         <p:spPr>
           <a:xfrm>
-            <a:off x="7626096" y="3514343"/>
-            <a:ext cx="3840480" cy="1301495"/>
+            <a:off x="7946136" y="3785616"/>
+            <a:ext cx="3520440" cy="1207007"/>
           </a:xfrm>
           <a:prstGeom prst="rect">
             <a:avLst/>
@@ -19362,7 +19463,7 @@
               </a:lnSpc>
             </a:pPr>
             <a:r>
-              <a:rPr sz="1200" b="0" i="0">
+              <a:rPr sz="1150" b="0" i="0">
                 <a:solidFill>
                   <a:srgbClr val="21295C"/>
                 </a:solidFill>
@@ -19381,8 +19482,8 @@
         </p:nvCxnSpPr>
         <p:spPr>
           <a:xfrm>
-            <a:off x="7123176" y="4815839"/>
-            <a:ext cx="4343400" cy="0"/>
+            <a:off x="7443215" y="4992624"/>
+            <a:ext cx="4023361" cy="0"/>
           </a:xfrm>
           <a:prstGeom prst="line">
             <a:avLst/>
@@ -19416,8 +19517,8 @@
         </p:nvSpPr>
         <p:spPr>
           <a:xfrm>
-            <a:off x="7123176" y="4815839"/>
-            <a:ext cx="457200" cy="1301495"/>
+            <a:off x="7443215" y="4992624"/>
+            <a:ext cx="457200" cy="1207007"/>
           </a:xfrm>
           <a:prstGeom prst="rect">
             <a:avLst/>
@@ -19436,7 +19537,7 @@
               </a:lnSpc>
             </a:pPr>
             <a:r>
-              <a:rPr sz="1600" b="1" i="0">
+              <a:rPr sz="1550" b="1" i="0">
                 <a:solidFill>
                   <a:srgbClr val="028090"/>
                 </a:solidFill>
@@ -19455,8 +19556,8 @@
         </p:nvSpPr>
         <p:spPr>
           <a:xfrm>
-            <a:off x="7626096" y="4815839"/>
-            <a:ext cx="3840480" cy="1301495"/>
+            <a:off x="7946136" y="4992624"/>
+            <a:ext cx="3520440" cy="1207007"/>
           </a:xfrm>
           <a:prstGeom prst="rect">
             <a:avLst/>
@@ -19475,13 +19576,13 @@
               </a:lnSpc>
             </a:pPr>
             <a:r>
-              <a:rPr sz="1200" b="0" i="0">
+              <a:rPr sz="1150" b="0" i="0">
                 <a:solidFill>
                   <a:srgbClr val="21295C"/>
                 </a:solidFill>
                 <a:latin typeface="Arial"/>
               </a:rPr>
-              <a:t>AGENTS.md is a symlink to the same file (ln -s CLAUDE.md AGENTS.md). The sharp edge: cp -R without -P on macOS silently dereferences the symlink into a second copy — copy with cp -a / git clone / git archive</a:t>
+              <a:t>AGENTS.md is a symlink to the same file (ln -s CLAUDE.md AGENTS.md). Sharp edge: cp -R on a symlink is not defined by the standard (POSIX.1-2024); -P states the intent, -L breaks the symlink for certain</a:t>
             </a:r>
           </a:p>
         </p:txBody>
@@ -25930,7 +26031,7 @@
                 </a:solidFill>
                 <a:latin typeface="Arial"/>
               </a:rPr>
-              <a:t>The root file stayed the same, thirteen lines long — the detail went off into a comment on the function, the test convention already sits in the tests, not a single nested instruction file got set up</a:t>
+              <a:t>The root file stayed the same, fifteen lines long — the detail went off into a comment on the function, the test convention already sits in the tests, not a single nested instruction file got set up</a:t>
             </a:r>
           </a:p>
         </p:txBody>
@@ -26078,7 +26179,7 @@
                 </a:solidFill>
                 <a:latin typeface="Consolas"/>
               </a:rPr>
-              <a:t>CLAUDE.md              ← the same 13 lines, no growth</a:t>
+              <a:t>CLAUDE.md              ← the same 15 lines, no growth</a:t>
             </a:r>
           </a:p>
           <a:p>
@@ -33334,8 +33435,8 @@
                 </a:solidFill>
                 <a:latin typeface="Arial"/>
               </a:rPr>
-              <a:t>We are not pulling in a third-party
-validation library — the form has two fields</a:t>
+              <a:t>We are not adding a third-party validation
+widget — the form has two fields</a:t>
             </a:r>
           </a:p>
         </p:txBody>
@@ -33774,7 +33875,7 @@
                 </a:solidFill>
                 <a:latin typeface="Consolas"/>
               </a:rPr>
-              <a:t>the assembled entry — a real file from the demo repository</a:t>
+              <a:t>the assembled entry — a real file from the demo repository (commit 94c5378)</a:t>
             </a:r>
           </a:p>
         </p:txBody>
@@ -33816,7 +33917,7 @@
                 </a:solidFill>
                 <a:latin typeface="Consolas"/>
               </a:rPr>
-              <a:t>## 2026-09-20 — we are not pulling in a form-validation library</a:t>
+              <a:t>## 2026-09-24 — no third-party widgets in the form</a:t>
             </a:r>
           </a:p>
           <a:p>
@@ -33854,7 +33955,26 @@
                 </a:solidFill>
                 <a:latin typeface="Consolas"/>
               </a:rPr>
-              <a:t>index.html are enough. A third-party library is an extra dependency for this scope.</a:t>
+              <a:t>index.html are enough. A third-party widget is an extra dependency and</a:t>
+            </a:r>
+          </a:p>
+          <a:p>
+            <a:pPr algn="l">
+              <a:lnSpc>
+                <a:spcPct val="132000"/>
+              </a:lnSpc>
+              <a:spcAft>
+                <a:spcPts val="200"/>
+              </a:spcAft>
+            </a:pPr>
+            <a:r>
+              <a:rPr sz="1150" b="0" i="0">
+                <a:solidFill>
+                  <a:srgbClr val="E3E9F2"/>
+                </a:solidFill>
+                <a:latin typeface="Consolas"/>
+              </a:rPr>
+              <a:t>extra kilobytes in the bundle for this much functionality.</a:t>
             </a:r>
           </a:p>
         </p:txBody>
@@ -34163,7 +34283,7 @@
                 </a:solidFill>
                 <a:latin typeface="Consolas"/>
               </a:rPr>
-              <a:t>## 2026-09-26 — no third-party widgets in the form</a:t>
+              <a:t>## 2026-09-24 — no third-party widgets in the form</a:t>
             </a:r>
           </a:p>
           <a:p>
@@ -34220,7 +34340,7 @@
                 </a:solidFill>
                 <a:latin typeface="Consolas"/>
               </a:rPr>
-              <a:t>and extra kilobytes in the bundle for this scope.</a:t>
+              <a:t>and extra kilobytes in the bundle for this much functionality.</a:t>
             </a:r>
           </a:p>
         </p:txBody>
@@ -34502,6 +34622,44 @@
                 <a:latin typeface="Consolas"/>
               </a:rPr>
               <a:t>tests/form.spec.ts</a:t>
+            </a:r>
+          </a:p>
+          <a:p>
+            <a:pPr algn="l">
+              <a:lnSpc>
+                <a:spcPct val="132000"/>
+              </a:lnSpc>
+              <a:spcAft>
+                <a:spcPts val="200"/>
+              </a:spcAft>
+            </a:pPr>
+            <a:r>
+              <a:rPr sz="1050" b="0" i="0">
+                <a:solidFill>
+                  <a:srgbClr val="E3E9F2"/>
+                </a:solidFill>
+                <a:latin typeface="Consolas"/>
+              </a:rPr>
+              <a:t>tests/delivery.spec.ts</a:t>
+            </a:r>
+          </a:p>
+          <a:p>
+            <a:pPr algn="l">
+              <a:lnSpc>
+                <a:spcPct val="132000"/>
+              </a:lnSpc>
+              <a:spcAft>
+                <a:spcPts val="200"/>
+              </a:spcAft>
+            </a:pPr>
+            <a:r>
+              <a:rPr sz="1050" b="0" i="0">
+                <a:solidFill>
+                  <a:srgbClr val="E3E9F2"/>
+                </a:solidFill>
+                <a:latin typeface="Consolas"/>
+              </a:rPr>
+              <a:t>tests/page-objects/form.page.ts</a:t>
             </a:r>
           </a:p>
         </p:txBody>

--- a/library/seminars/sem-04/rendered/sem-04-en.pptx
+++ b/library/seminars/sem-04/rendered/sem-04-en.pptx
@@ -28749,7 +28749,7 @@
                 </a:solidFill>
                 <a:latin typeface="Consolas"/>
               </a:rPr>
-              <a:t>- Acceptance criterion: the form actually delivers the submission — verified</a:t>
+              <a:t>- Acceptance criterion: the submission actually goes out — the form</a:t>
             </a:r>
           </a:p>
           <a:p>
@@ -28768,7 +28768,7 @@
                 </a:solidFill>
                 <a:latin typeface="Consolas"/>
               </a:rPr>
-              <a:t>  in prod, not just "the test is green"</a:t>
+              <a:t>  submitted by hand from the built page, not just "the test is green"</a:t>
             </a:r>
           </a:p>
           <a:p>
@@ -40839,6 +40839,63 @@
                 <a:latin typeface="Consolas"/>
               </a:rPr>
               <a:t>  README.md   ← adr generate toc</a:t>
+            </a:r>
+          </a:p>
+          <a:p>
+            <a:pPr algn="l">
+              <a:lnSpc>
+                <a:spcPct val="132000"/>
+              </a:lnSpc>
+              <a:spcAft>
+                <a:spcPts val="200"/>
+              </a:spcAft>
+            </a:pPr>
+            <a:r>
+              <a:rPr sz="1080" b="0" i="0">
+                <a:solidFill>
+                  <a:srgbClr val="E3E9F2"/>
+                </a:solidFill>
+                <a:latin typeface="Consolas"/>
+              </a:rPr>
+              <a:t/>
+            </a:r>
+          </a:p>
+          <a:p>
+            <a:pPr algn="l">
+              <a:lnSpc>
+                <a:spcPct val="132000"/>
+              </a:lnSpc>
+              <a:spcAft>
+                <a:spcPts val="200"/>
+              </a:spcAft>
+            </a:pPr>
+            <a:r>
+              <a:rPr sz="1080" b="0" i="0">
+                <a:solidFill>
+                  <a:srgbClr val="F0AB00"/>
+                </a:solidFill>
+                <a:latin typeface="Consolas"/>
+              </a:rPr>
+              <a:t>  0031 — the same record as in case 2.1:</a:t>
+            </a:r>
+          </a:p>
+          <a:p>
+            <a:pPr algn="l">
+              <a:lnSpc>
+                <a:spcPct val="132000"/>
+              </a:lnSpc>
+              <a:spcAft>
+                <a:spcPts val="200"/>
+              </a:spcAft>
+            </a:pPr>
+            <a:r>
+              <a:rPr sz="1080" b="0" i="0">
+                <a:solidFill>
+                  <a:srgbClr val="F0AB00"/>
+                </a:solidFill>
+                <a:latin typeface="Consolas"/>
+              </a:rPr>
+              <a:t>  it moved here out of DECISIONS.md</a:t>
             </a:r>
           </a:p>
         </p:txBody>

--- a/library/seminars/sem-04/rendered/sem-04-en.pptx
+++ b/library/seminars/sem-04/rendered/sem-04-en.pptx
@@ -3676,7 +3676,7 @@
           <a:p/>
           <a:p>
             <a:r>
-              <a:t>Honestly about the strength of evidence: this is a practice for humans. It has been documented since 2011 and is widely used — a 2026 study collected more than four and a half thousand ADRs from seven hundred and fifty projects out of open repositories. But there is not a single controlled measurement that 'ADRs help a coding agent'. The content of our two records is illustrative; a real snapshot awaits a live session."</a:t>
+              <a:t>Honestly about the strength of evidence: this is a practice for humans. It has been documented since 2011 and is widely used — a 2026 study collected more than four and a half thousand ADRs from seven hundred and fifty projects out of open repositories. But there is not a single controlled measurement that 'ADRs help a coding agent'. The content of our two records is illustrative. A snapshot of the demo repository does exist — the `doc/adr/` directory, commit `3b4b289` — but it shows a different scene: it holds three records, there is no `Amends` / `Amended by` pair between them, and `adr-tools` was never installed there, so the table of contents was written by hand. The structure, the sections and the format of the link line come from the `adr-tools` template and sources — they are not invented."</a:t>
             </a:r>
           </a:p>
         </p:txBody>
@@ -41283,7 +41283,7 @@
                 </a:solidFill>
                 <a:latin typeface="Arial"/>
               </a:rPr>
-              <a:t>Source of the practice: ADR — Michael Nygard, 2011; adr-tools. Strength of evidence: a documented practice for humans (4500+ ADRs in 750 projects), but there is no controlled measurement that "ADRs help an agent". The content of the records is illustrative, awaiting a live session.</a:t>
+              <a:t>Source of the practice: ADR — Michael Nygard, 2011; adr-tools. Strength of evidence: a documented practice for humans (4500+ ADRs in 750 projects), but there is no controlled measurement that "ADRs help an agent". The content of the records is illustrative: the numbers 0031/0187 and the matching Amends / Amended by pair. A capture of the demo repository does exist (doc/adr/, commit 3b4b289), but it shows a different scene: it holds three records, there are no cross-links between them, and adr-tools is not installed.</a:t>
             </a:r>
           </a:p>
         </p:txBody>
